--- a/generated/Tier 1 Broker Scorecards/Commercial Trucking Insurance Agency LLC_Broker_Scorecard.pptx
+++ b/generated/Tier 1 Broker Scorecards/Commercial Trucking Insurance Agency LLC_Broker_Scorecard.pptx
@@ -3357,7 +3357,7 @@
                         <a:rPr sz="800">
                           <a:latin typeface="Segoe UI"/>
                         </a:rPr>
-                        <a:t>$13,030,311.27 / $12,678,124.51 / $3,919,843.57</a:t>
+                        <a:t>$13,030,311.27 / $12,722,290.40 / $3,964,009.46</a:t>
                       </a:r>
                     </a:p>
                   </a:txBody>
@@ -3394,7 +3394,7 @@
                         <a:rPr sz="900">
                           <a:latin typeface="Segoe UI"/>
                         </a:rPr>
-                        <a:t>Tier 1  |  27.65% / 15.00%</a:t>
+                        <a:t>Tier 1  |  26.77% / 15.00%</a:t>
                       </a:r>
                     </a:p>
                   </a:txBody>
@@ -3431,7 +3431,7 @@
                         <a:rPr sz="900">
                           <a:latin typeface="Segoe UI"/>
                         </a:rPr>
-                        <a:t>$18,242,435.78  (21.5% achieved)</a:t>
+                        <a:t>$18,242,435.78  (21.7% achieved)</a:t>
                       </a:r>
                     </a:p>
                   </a:txBody>
@@ -3653,7 +3653,7 @@
                         <a:rPr sz="900">
                           <a:latin typeface="Segoe UI"/>
                         </a:rPr>
-                        <a:t>Fleet Subs: 41  |  Binds: 20</a:t>
+                        <a:t>Fleet Subs: 39  |  Binds: 17</a:t>
                       </a:r>
                     </a:p>
                   </a:txBody>
@@ -3690,7 +3690,7 @@
                         <a:rPr sz="900">
                           <a:latin typeface="Segoe UI"/>
                         </a:rPr>
-                        <a:t>Fleet Bound Premium: $1,397,620.74</a:t>
+                        <a:t>Fleet Bound Premium: $1,317,804.26</a:t>
                       </a:r>
                     </a:p>
                   </a:txBody>
@@ -3727,7 +3727,7 @@
                         <a:rPr sz="900">
                           <a:latin typeface="Segoe UI"/>
                         </a:rPr>
-                        <a:t>Fleet Book %: 35.7%</a:t>
+                        <a:t>Fleet Book %: 33.2%</a:t>
                       </a:r>
                     </a:p>
                   </a:txBody>
@@ -3766,7 +3766,7 @@
                         <a:rPr sz="900">
                           <a:latin typeface="Segoe UI"/>
                         </a:rPr>
-                        <a:t>Non-Fleet Subs: 487  |  Binds: 126</a:t>
+                        <a:t>Non-Fleet Subs: 499  |  Binds: 127</a:t>
                       </a:r>
                     </a:p>
                   </a:txBody>
@@ -3803,7 +3803,7 @@
                         <a:rPr sz="900">
                           <a:latin typeface="Segoe UI"/>
                         </a:rPr>
-                        <a:t>Non-Fleet Bound Premium: $2,522,222.83</a:t>
+                        <a:t>Non-Fleet Bound Premium: $2,646,205.20</a:t>
                       </a:r>
                     </a:p>
                   </a:txBody>
@@ -3840,7 +3840,7 @@
                         <a:rPr sz="900">
                           <a:latin typeface="Segoe UI"/>
                         </a:rPr>
-                        <a:t>Non-Fleet Book %: 64.3%</a:t>
+                        <a:t>Non-Fleet Book %: 66.8%</a:t>
                       </a:r>
                     </a:p>
                   </a:txBody>
@@ -4428,7 +4428,7 @@
                           </a:solidFill>
                           <a:latin typeface="Segoe UI"/>
                         </a:rPr>
-                        <a:t>95</a:t>
+                        <a:t>111</a:t>
                       </a:r>
                     </a:p>
                   </a:txBody>
@@ -4581,7 +4581,7 @@
                         <a:rPr sz="800">
                           <a:latin typeface="Segoe UI"/>
                         </a:rPr>
-                        <a:t>38.8%</a:t>
+                        <a:t>39.2%</a:t>
                       </a:r>
                     </a:p>
                   </a:txBody>
@@ -4664,7 +4664,7 @@
                         <a:rPr sz="800">
                           <a:latin typeface="Segoe UI"/>
                         </a:rPr>
-                        <a:t>46.1%</a:t>
+                        <a:t>46.6%</a:t>
                       </a:r>
                     </a:p>
                   </a:txBody>
@@ -4707,7 +4707,7 @@
                           </a:solidFill>
                           <a:latin typeface="Segoe UI"/>
                         </a:rPr>
-                        <a:t>35.8%</a:t>
+                        <a:t>34.2%</a:t>
                       </a:r>
                     </a:p>
                   </a:txBody>
@@ -4866,7 +4866,7 @@
                         <a:rPr sz="800">
                           <a:latin typeface="Segoe UI"/>
                         </a:rPr>
-                        <a:t>95</a:t>
+                        <a:t>96</a:t>
                       </a:r>
                     </a:p>
                   </a:txBody>
@@ -4943,7 +4943,7 @@
                         <a:rPr sz="800">
                           <a:latin typeface="Segoe UI"/>
                         </a:rPr>
-                        <a:t>94</a:t>
+                        <a:t>95</a:t>
                       </a:r>
                     </a:p>
                   </a:txBody>
@@ -4983,7 +4983,7 @@
                           </a:solidFill>
                           <a:latin typeface="Segoe UI"/>
                         </a:rPr>
-                        <a:t>34</a:t>
+                        <a:t>38</a:t>
                       </a:r>
                     </a:p>
                   </a:txBody>
@@ -5262,7 +5262,7 @@
                           </a:solidFill>
                           <a:latin typeface="Segoe UI"/>
                         </a:rPr>
-                        <a:t>$412.8K</a:t>
+                        <a:t>$457.0K</a:t>
                       </a:r>
                     </a:p>
                   </a:txBody>

--- a/generated/Tier 1 Broker Scorecards/Commercial Trucking Insurance Agency LLC_Broker_Scorecard.pptx
+++ b/generated/Tier 1 Broker Scorecards/Commercial Trucking Insurance Agency LLC_Broker_Scorecard.pptx
@@ -3394,7 +3394,7 @@
                         <a:rPr sz="900">
                           <a:latin typeface="Segoe UI"/>
                         </a:rPr>
-                        <a:t>Tier 1  |  26.77% / 15.00%</a:t>
+                        <a:t>Tier 1  |  25.69% / 15.00%</a:t>
                       </a:r>
                     </a:p>
                   </a:txBody>
@@ -3653,7 +3653,7 @@
                         <a:rPr sz="900">
                           <a:latin typeface="Segoe UI"/>
                         </a:rPr>
-                        <a:t>Fleet Subs: 39  |  Binds: 17</a:t>
+                        <a:t>Fleet Subs: 40  |  Binds: 17</a:t>
                       </a:r>
                     </a:p>
                   </a:txBody>
@@ -3690,7 +3690,7 @@
                         <a:rPr sz="900">
                           <a:latin typeface="Segoe UI"/>
                         </a:rPr>
-                        <a:t>Fleet Bound Premium: $1,317,804.26</a:t>
+                        <a:t>Fleet Bound Premium: $1,332,909.65</a:t>
                       </a:r>
                     </a:p>
                   </a:txBody>
@@ -3727,7 +3727,7 @@
                         <a:rPr sz="900">
                           <a:latin typeface="Segoe UI"/>
                         </a:rPr>
-                        <a:t>Fleet Book %: 33.2%</a:t>
+                        <a:t>Fleet Book %: 33.6%</a:t>
                       </a:r>
                     </a:p>
                   </a:txBody>
@@ -3766,7 +3766,7 @@
                         <a:rPr sz="900">
                           <a:latin typeface="Segoe UI"/>
                         </a:rPr>
-                        <a:t>Non-Fleet Subs: 499  |  Binds: 127</a:t>
+                        <a:t>Non-Fleet Subs: 501  |  Binds: 122</a:t>
                       </a:r>
                     </a:p>
                   </a:txBody>
@@ -3803,7 +3803,7 @@
                         <a:rPr sz="900">
                           <a:latin typeface="Segoe UI"/>
                         </a:rPr>
-                        <a:t>Non-Fleet Bound Premium: $2,646,205.20</a:t>
+                        <a:t>Non-Fleet Bound Premium: $2,631,099.81</a:t>
                       </a:r>
                     </a:p>
                   </a:txBody>
@@ -3840,7 +3840,7 @@
                         <a:rPr sz="900">
                           <a:latin typeface="Segoe UI"/>
                         </a:rPr>
-                        <a:t>Non-Fleet Book %: 66.8%</a:t>
+                        <a:t>Non-Fleet Book %: 66.4%</a:t>
                       </a:r>
                     </a:p>
                   </a:txBody>
@@ -4428,7 +4428,7 @@
                           </a:solidFill>
                           <a:latin typeface="Segoe UI"/>
                         </a:rPr>
-                        <a:t>111</a:t>
+                        <a:t>122</a:t>
                       </a:r>
                     </a:p>
                   </a:txBody>
@@ -4581,7 +4581,7 @@
                         <a:rPr sz="800">
                           <a:latin typeface="Segoe UI"/>
                         </a:rPr>
-                        <a:t>39.2%</a:t>
+                        <a:t>38.8%</a:t>
                       </a:r>
                     </a:p>
                   </a:txBody>
@@ -4664,7 +4664,7 @@
                         <a:rPr sz="800">
                           <a:latin typeface="Segoe UI"/>
                         </a:rPr>
-                        <a:t>46.6%</a:t>
+                        <a:t>46.1%</a:t>
                       </a:r>
                     </a:p>
                   </a:txBody>
@@ -4707,7 +4707,7 @@
                           </a:solidFill>
                           <a:latin typeface="Segoe UI"/>
                         </a:rPr>
-                        <a:t>34.2%</a:t>
+                        <a:t>29.5%</a:t>
                       </a:r>
                     </a:p>
                   </a:txBody>
@@ -4866,7 +4866,7 @@
                         <a:rPr sz="800">
                           <a:latin typeface="Segoe UI"/>
                         </a:rPr>
-                        <a:t>96</a:t>
+                        <a:t>95</a:t>
                       </a:r>
                     </a:p>
                   </a:txBody>
@@ -4943,7 +4943,7 @@
                         <a:rPr sz="800">
                           <a:latin typeface="Segoe UI"/>
                         </a:rPr>
-                        <a:t>95</a:t>
+                        <a:t>94</a:t>
                       </a:r>
                     </a:p>
                   </a:txBody>
@@ -4983,7 +4983,7 @@
                           </a:solidFill>
                           <a:latin typeface="Segoe UI"/>
                         </a:rPr>
-                        <a:t>38</a:t>
+                        <a:t>36</a:t>
                       </a:r>
                     </a:p>
                   </a:txBody>

--- a/generated/Tier 1 Broker Scorecards/Commercial Trucking Insurance Agency LLC_Broker_Scorecard.pptx
+++ b/generated/Tier 1 Broker Scorecards/Commercial Trucking Insurance Agency LLC_Broker_Scorecard.pptx
@@ -3357,7 +3357,7 @@
                         <a:rPr sz="800">
                           <a:latin typeface="Segoe UI"/>
                         </a:rPr>
-                        <a:t>$13,030,311.27 / $12,722,290.40 / $3,964,009.46</a:t>
+                        <a:t>$13,030,311.27 / $12,772,133.43 / $4,013,852.49</a:t>
                       </a:r>
                     </a:p>
                   </a:txBody>
@@ -3394,7 +3394,7 @@
                         <a:rPr sz="900">
                           <a:latin typeface="Segoe UI"/>
                         </a:rPr>
-                        <a:t>Tier 1  |  25.69% / 15.00%</a:t>
+                        <a:t>Tier 1  |  26.52% / 15.00%</a:t>
                       </a:r>
                     </a:p>
                   </a:txBody>
@@ -3431,7 +3431,7 @@
                         <a:rPr sz="900">
                           <a:latin typeface="Segoe UI"/>
                         </a:rPr>
-                        <a:t>$18,242,435.78  (21.7% achieved)</a:t>
+                        <a:t>$18,242,435.78  (22.0% achieved)</a:t>
                       </a:r>
                     </a:p>
                   </a:txBody>
@@ -3653,7 +3653,7 @@
                         <a:rPr sz="900">
                           <a:latin typeface="Segoe UI"/>
                         </a:rPr>
-                        <a:t>Fleet Subs: 40  |  Binds: 17</a:t>
+                        <a:t>Fleet Subs: 39  |  Binds: 17</a:t>
                       </a:r>
                     </a:p>
                   </a:txBody>
@@ -3690,7 +3690,7 @@
                         <a:rPr sz="900">
                           <a:latin typeface="Segoe UI"/>
                         </a:rPr>
-                        <a:t>Fleet Bound Premium: $1,332,909.65</a:t>
+                        <a:t>Fleet Bound Premium: $1,380,785.24</a:t>
                       </a:r>
                     </a:p>
                   </a:txBody>
@@ -3727,7 +3727,7 @@
                         <a:rPr sz="900">
                           <a:latin typeface="Segoe UI"/>
                         </a:rPr>
-                        <a:t>Fleet Book %: 33.6%</a:t>
+                        <a:t>Fleet Book %: 34.4%</a:t>
                       </a:r>
                     </a:p>
                   </a:txBody>
@@ -3766,7 +3766,7 @@
                         <a:rPr sz="900">
                           <a:latin typeface="Segoe UI"/>
                         </a:rPr>
-                        <a:t>Non-Fleet Subs: 501  |  Binds: 122</a:t>
+                        <a:t>Non-Fleet Subs: 504  |  Binds: 127</a:t>
                       </a:r>
                     </a:p>
                   </a:txBody>
@@ -3803,7 +3803,7 @@
                         <a:rPr sz="900">
                           <a:latin typeface="Segoe UI"/>
                         </a:rPr>
-                        <a:t>Non-Fleet Bound Premium: $2,631,099.81</a:t>
+                        <a:t>Non-Fleet Bound Premium: $2,633,067.25</a:t>
                       </a:r>
                     </a:p>
                   </a:txBody>
@@ -3840,7 +3840,7 @@
                         <a:rPr sz="900">
                           <a:latin typeface="Segoe UI"/>
                         </a:rPr>
-                        <a:t>Non-Fleet Book %: 66.4%</a:t>
+                        <a:t>Non-Fleet Book %: 65.6%</a:t>
                       </a:r>
                     </a:p>
                   </a:txBody>
@@ -4351,7 +4351,7 @@
                           </a:solidFill>
                           <a:latin typeface="Segoe UI"/>
                         </a:rPr>
-                        <a:t>197</a:t>
+                        <a:t>196</a:t>
                       </a:r>
                     </a:p>
                   </a:txBody>
@@ -4428,7 +4428,7 @@
                           </a:solidFill>
                           <a:latin typeface="Segoe UI"/>
                         </a:rPr>
-                        <a:t>122</a:t>
+                        <a:t>125</a:t>
                       </a:r>
                     </a:p>
                   </a:txBody>
@@ -4581,7 +4581,7 @@
                         <a:rPr sz="800">
                           <a:latin typeface="Segoe UI"/>
                         </a:rPr>
-                        <a:t>38.8%</a:t>
+                        <a:t>39.6%</a:t>
                       </a:r>
                     </a:p>
                   </a:txBody>
@@ -4624,7 +4624,7 @@
                           </a:solidFill>
                           <a:latin typeface="Segoe UI"/>
                         </a:rPr>
-                        <a:t>29.9%</a:t>
+                        <a:t>30.1%</a:t>
                       </a:r>
                     </a:p>
                   </a:txBody>
@@ -4707,7 +4707,7 @@
                           </a:solidFill>
                           <a:latin typeface="Segoe UI"/>
                         </a:rPr>
-                        <a:t>29.5%</a:t>
+                        <a:t>32.8%</a:t>
                       </a:r>
                     </a:p>
                   </a:txBody>
@@ -4866,7 +4866,7 @@
                         <a:rPr sz="800">
                           <a:latin typeface="Segoe UI"/>
                         </a:rPr>
-                        <a:t>95</a:t>
+                        <a:t>97</a:t>
                       </a:r>
                     </a:p>
                   </a:txBody>
@@ -4983,7 +4983,7 @@
                           </a:solidFill>
                           <a:latin typeface="Segoe UI"/>
                         </a:rPr>
-                        <a:t>36</a:t>
+                        <a:t>41</a:t>
                       </a:r>
                     </a:p>
                   </a:txBody>
@@ -5262,7 +5262,7 @@
                           </a:solidFill>
                           <a:latin typeface="Segoe UI"/>
                         </a:rPr>
-                        <a:t>$457.0K</a:t>
+                        <a:t>$506.8K</a:t>
                       </a:r>
                     </a:p>
                   </a:txBody>

--- a/generated/Tier 1 Broker Scorecards/Commercial Trucking Insurance Agency LLC_Broker_Scorecard.pptx
+++ b/generated/Tier 1 Broker Scorecards/Commercial Trucking Insurance Agency LLC_Broker_Scorecard.pptx
@@ -3357,7 +3357,7 @@
                         <a:rPr sz="800">
                           <a:latin typeface="Segoe UI"/>
                         </a:rPr>
-                        <a:t>$13,030,311.27 / $12,772,133.43 / $4,013,852.49</a:t>
+                        <a:t>$13,030,311.27 / $12,854,590.71 / $4,096,309.77</a:t>
                       </a:r>
                     </a:p>
                   </a:txBody>
@@ -3394,7 +3394,7 @@
                         <a:rPr sz="900">
                           <a:latin typeface="Segoe UI"/>
                         </a:rPr>
-                        <a:t>Tier 1  |  26.52% / 15.00%</a:t>
+                        <a:t>Tier 1  |  26.19% / 15.00%</a:t>
                       </a:r>
                     </a:p>
                   </a:txBody>
@@ -3431,7 +3431,7 @@
                         <a:rPr sz="900">
                           <a:latin typeface="Segoe UI"/>
                         </a:rPr>
-                        <a:t>$18,242,435.78  (22.0% achieved)</a:t>
+                        <a:t>$18,242,435.78  (22.5% achieved)</a:t>
                       </a:r>
                     </a:p>
                   </a:txBody>
@@ -3653,7 +3653,7 @@
                         <a:rPr sz="900">
                           <a:latin typeface="Segoe UI"/>
                         </a:rPr>
-                        <a:t>Fleet Subs: 39  |  Binds: 17</a:t>
+                        <a:t>Fleet Subs: 40  |  Binds: 17</a:t>
                       </a:r>
                     </a:p>
                   </a:txBody>
@@ -3690,7 +3690,7 @@
                         <a:rPr sz="900">
                           <a:latin typeface="Segoe UI"/>
                         </a:rPr>
-                        <a:t>Fleet Bound Premium: $1,380,785.24</a:t>
+                        <a:t>Fleet Bound Premium: $1,376,257.28</a:t>
                       </a:r>
                     </a:p>
                   </a:txBody>
@@ -3727,7 +3727,7 @@
                         <a:rPr sz="900">
                           <a:latin typeface="Segoe UI"/>
                         </a:rPr>
-                        <a:t>Fleet Book %: 34.4%</a:t>
+                        <a:t>Fleet Book %: 33.6%</a:t>
                       </a:r>
                     </a:p>
                   </a:txBody>
@@ -3766,7 +3766,7 @@
                         <a:rPr sz="900">
                           <a:latin typeface="Segoe UI"/>
                         </a:rPr>
-                        <a:t>Non-Fleet Subs: 504  |  Binds: 127</a:t>
+                        <a:t>Non-Fleet Subs: 506  |  Binds: 126</a:t>
                       </a:r>
                     </a:p>
                   </a:txBody>
@@ -3803,7 +3803,7 @@
                         <a:rPr sz="900">
                           <a:latin typeface="Segoe UI"/>
                         </a:rPr>
-                        <a:t>Non-Fleet Bound Premium: $2,633,067.25</a:t>
+                        <a:t>Non-Fleet Bound Premium: $2,720,052.49</a:t>
                       </a:r>
                     </a:p>
                   </a:txBody>
@@ -3840,7 +3840,7 @@
                         <a:rPr sz="900">
                           <a:latin typeface="Segoe UI"/>
                         </a:rPr>
-                        <a:t>Non-Fleet Book %: 65.6%</a:t>
+                        <a:t>Non-Fleet Book %: 66.4%</a:t>
                       </a:r>
                     </a:p>
                   </a:txBody>
@@ -4428,7 +4428,7 @@
                           </a:solidFill>
                           <a:latin typeface="Segoe UI"/>
                         </a:rPr>
-                        <a:t>125</a:t>
+                        <a:t>129</a:t>
                       </a:r>
                     </a:p>
                   </a:txBody>
@@ -4581,7 +4581,7 @@
                         <a:rPr sz="800">
                           <a:latin typeface="Segoe UI"/>
                         </a:rPr>
-                        <a:t>39.6%</a:t>
+                        <a:t>39.2%</a:t>
                       </a:r>
                     </a:p>
                   </a:txBody>
@@ -4707,7 +4707,7 @@
                           </a:solidFill>
                           <a:latin typeface="Segoe UI"/>
                         </a:rPr>
-                        <a:t>32.8%</a:t>
+                        <a:t>31.0%</a:t>
                       </a:r>
                     </a:p>
                   </a:txBody>
@@ -4866,7 +4866,7 @@
                         <a:rPr sz="800">
                           <a:latin typeface="Segoe UI"/>
                         </a:rPr>
-                        <a:t>97</a:t>
+                        <a:t>96</a:t>
                       </a:r>
                     </a:p>
                   </a:txBody>
@@ -4983,7 +4983,7 @@
                           </a:solidFill>
                           <a:latin typeface="Segoe UI"/>
                         </a:rPr>
-                        <a:t>41</a:t>
+                        <a:t>40</a:t>
                       </a:r>
                     </a:p>
                   </a:txBody>
@@ -5262,7 +5262,7 @@
                           </a:solidFill>
                           <a:latin typeface="Segoe UI"/>
                         </a:rPr>
-                        <a:t>$506.8K</a:t>
+                        <a:t>$589.3K</a:t>
                       </a:r>
                     </a:p>
                   </a:txBody>

--- a/generated/Tier 1 Broker Scorecards/Commercial Trucking Insurance Agency LLC_Broker_Scorecard.pptx
+++ b/generated/Tier 1 Broker Scorecards/Commercial Trucking Insurance Agency LLC_Broker_Scorecard.pptx
@@ -3394,7 +3394,7 @@
                         <a:rPr sz="900">
                           <a:latin typeface="Segoe UI"/>
                         </a:rPr>
-                        <a:t>Tier 1  |  26.19% / 15.00%</a:t>
+                        <a:t>Tier 1  |  23.96% / 15.00%</a:t>
                       </a:r>
                     </a:p>
                   </a:txBody>
@@ -3653,7 +3653,7 @@
                         <a:rPr sz="900">
                           <a:latin typeface="Segoe UI"/>
                         </a:rPr>
-                        <a:t>Fleet Subs: 40  |  Binds: 17</a:t>
+                        <a:t>Fleet Subs: 40  |  Binds: 12</a:t>
                       </a:r>
                     </a:p>
                   </a:txBody>
@@ -3690,7 +3690,7 @@
                         <a:rPr sz="900">
                           <a:latin typeface="Segoe UI"/>
                         </a:rPr>
-                        <a:t>Fleet Bound Premium: $1,376,257.28</a:t>
+                        <a:t>Fleet Bound Premium: $1,061,377.69</a:t>
                       </a:r>
                     </a:p>
                   </a:txBody>
@@ -3727,7 +3727,7 @@
                         <a:rPr sz="900">
                           <a:latin typeface="Segoe UI"/>
                         </a:rPr>
-                        <a:t>Fleet Book %: 33.6%</a:t>
+                        <a:t>Fleet Book %: 25.9%</a:t>
                       </a:r>
                     </a:p>
                   </a:txBody>
@@ -3766,7 +3766,7 @@
                         <a:rPr sz="900">
                           <a:latin typeface="Segoe UI"/>
                         </a:rPr>
-                        <a:t>Non-Fleet Subs: 506  |  Binds: 126</a:t>
+                        <a:t>Non-Fleet Subs: 511  |  Binds: 120</a:t>
                       </a:r>
                     </a:p>
                   </a:txBody>
@@ -3803,7 +3803,7 @@
                         <a:rPr sz="900">
                           <a:latin typeface="Segoe UI"/>
                         </a:rPr>
-                        <a:t>Non-Fleet Bound Premium: $2,720,052.49</a:t>
+                        <a:t>Non-Fleet Bound Premium: $3,034,932.08</a:t>
                       </a:r>
                     </a:p>
                   </a:txBody>
@@ -3840,7 +3840,7 @@
                         <a:rPr sz="900">
                           <a:latin typeface="Segoe UI"/>
                         </a:rPr>
-                        <a:t>Non-Fleet Book %: 66.4%</a:t>
+                        <a:t>Non-Fleet Book %: 74.1%</a:t>
                       </a:r>
                     </a:p>
                   </a:txBody>
@@ -4428,7 +4428,7 @@
                           </a:solidFill>
                           <a:latin typeface="Segoe UI"/>
                         </a:rPr>
-                        <a:t>129</a:t>
+                        <a:t>149</a:t>
                       </a:r>
                     </a:p>
                   </a:txBody>
@@ -4581,7 +4581,7 @@
                         <a:rPr sz="800">
                           <a:latin typeface="Segoe UI"/>
                         </a:rPr>
-                        <a:t>39.2%</a:t>
+                        <a:t>38.8%</a:t>
                       </a:r>
                     </a:p>
                   </a:txBody>
@@ -4707,7 +4707,7 @@
                           </a:solidFill>
                           <a:latin typeface="Segoe UI"/>
                         </a:rPr>
-                        <a:t>31.0%</a:t>
+                        <a:t>25.5%</a:t>
                       </a:r>
                     </a:p>
                   </a:txBody>
@@ -4866,7 +4866,7 @@
                         <a:rPr sz="800">
                           <a:latin typeface="Segoe UI"/>
                         </a:rPr>
-                        <a:t>96</a:t>
+                        <a:t>95</a:t>
                       </a:r>
                     </a:p>
                   </a:txBody>
@@ -4983,7 +4983,7 @@
                           </a:solidFill>
                           <a:latin typeface="Segoe UI"/>
                         </a:rPr>
-                        <a:t>40</a:t>
+                        <a:t>38</a:t>
                       </a:r>
                     </a:p>
                   </a:txBody>

--- a/generated/Tier 1 Broker Scorecards/Commercial Trucking Insurance Agency LLC_Broker_Scorecard.pptx
+++ b/generated/Tier 1 Broker Scorecards/Commercial Trucking Insurance Agency LLC_Broker_Scorecard.pptx
@@ -4581,7 +4581,7 @@
                         <a:rPr sz="800">
                           <a:latin typeface="Segoe UI"/>
                         </a:rPr>
-                        <a:t>38.8%</a:t>
+                        <a:t>39.2%</a:t>
                       </a:r>
                     </a:p>
                   </a:txBody>
@@ -4866,7 +4866,7 @@
                         <a:rPr sz="800">
                           <a:latin typeface="Segoe UI"/>
                         </a:rPr>
-                        <a:t>95</a:t>
+                        <a:t>96</a:t>
                       </a:r>
                     </a:p>
                   </a:txBody>

--- a/generated/Tier 1 Broker Scorecards/Commercial Trucking Insurance Agency LLC_Broker_Scorecard.pptx
+++ b/generated/Tier 1 Broker Scorecards/Commercial Trucking Insurance Agency LLC_Broker_Scorecard.pptx
@@ -3394,7 +3394,7 @@
                         <a:rPr sz="900">
                           <a:latin typeface="Segoe UI"/>
                         </a:rPr>
-                        <a:t>Tier 1  |  23.96% / 15.00%</a:t>
+                        <a:t>Tier 1  |  23.91% / 15.00%</a:t>
                       </a:r>
                     </a:p>
                   </a:txBody>
@@ -3653,7 +3653,7 @@
                         <a:rPr sz="900">
                           <a:latin typeface="Segoe UI"/>
                         </a:rPr>
-                        <a:t>Fleet Subs: 40  |  Binds: 12</a:t>
+                        <a:t>Fleet Subs: 41  |  Binds: 12</a:t>
                       </a:r>
                     </a:p>
                   </a:txBody>
@@ -3690,7 +3690,7 @@
                         <a:rPr sz="900">
                           <a:latin typeface="Segoe UI"/>
                         </a:rPr>
-                        <a:t>Fleet Bound Premium: $1,061,377.69</a:t>
+                        <a:t>Fleet Bound Premium: $1,060,752.13</a:t>
                       </a:r>
                     </a:p>
                   </a:txBody>
@@ -3803,7 +3803,7 @@
                         <a:rPr sz="900">
                           <a:latin typeface="Segoe UI"/>
                         </a:rPr>
-                        <a:t>Non-Fleet Bound Premium: $3,034,932.08</a:t>
+                        <a:t>Non-Fleet Bound Premium: $3,035,557.64</a:t>
                       </a:r>
                     </a:p>
                   </a:txBody>
@@ -4428,7 +4428,7 @@
                           </a:solidFill>
                           <a:latin typeface="Segoe UI"/>
                         </a:rPr>
-                        <a:t>149</a:t>
+                        <a:t>150</a:t>
                       </a:r>
                     </a:p>
                   </a:txBody>
@@ -4581,7 +4581,7 @@
                         <a:rPr sz="800">
                           <a:latin typeface="Segoe UI"/>
                         </a:rPr>
-                        <a:t>39.2%</a:t>
+                        <a:t>38.8%</a:t>
                       </a:r>
                     </a:p>
                   </a:txBody>
@@ -4707,7 +4707,7 @@
                           </a:solidFill>
                           <a:latin typeface="Segoe UI"/>
                         </a:rPr>
-                        <a:t>25.5%</a:t>
+                        <a:t>25.3%</a:t>
                       </a:r>
                     </a:p>
                   </a:txBody>
@@ -4866,7 +4866,7 @@
                         <a:rPr sz="800">
                           <a:latin typeface="Segoe UI"/>
                         </a:rPr>
-                        <a:t>96</a:t>
+                        <a:t>95</a:t>
                       </a:r>
                     </a:p>
                   </a:txBody>

--- a/generated/Tier 1 Broker Scorecards/Commercial Trucking Insurance Agency LLC_Broker_Scorecard.pptx
+++ b/generated/Tier 1 Broker Scorecards/Commercial Trucking Insurance Agency LLC_Broker_Scorecard.pptx
@@ -3357,7 +3357,7 @@
                         <a:rPr sz="800">
                           <a:latin typeface="Segoe UI"/>
                         </a:rPr>
-                        <a:t>$13,030,311.27 / $12,854,590.71 / $4,096,309.77</a:t>
+                        <a:t>$13,030,311.27 / $12,854,223.94 / $4,095,943.00</a:t>
                       </a:r>
                     </a:p>
                   </a:txBody>
@@ -3394,7 +3394,7 @@
                         <a:rPr sz="900">
                           <a:latin typeface="Segoe UI"/>
                         </a:rPr>
-                        <a:t>Tier 1  |  23.91% / 15.00%</a:t>
+                        <a:t>Tier 1  |  24.46% / 15.00%</a:t>
                       </a:r>
                     </a:p>
                   </a:txBody>
@@ -3653,7 +3653,7 @@
                         <a:rPr sz="900">
                           <a:latin typeface="Segoe UI"/>
                         </a:rPr>
-                        <a:t>Fleet Subs: 41  |  Binds: 12</a:t>
+                        <a:t>Fleet Subs: 40  |  Binds: 11</a:t>
                       </a:r>
                     </a:p>
                   </a:txBody>
@@ -3690,7 +3690,7 @@
                         <a:rPr sz="900">
                           <a:latin typeface="Segoe UI"/>
                         </a:rPr>
-                        <a:t>Fleet Bound Premium: $1,060,752.13</a:t>
+                        <a:t>Fleet Bound Premium: $1,030,676.16</a:t>
                       </a:r>
                     </a:p>
                   </a:txBody>
@@ -3727,7 +3727,7 @@
                         <a:rPr sz="900">
                           <a:latin typeface="Segoe UI"/>
                         </a:rPr>
-                        <a:t>Fleet Book %: 25.9%</a:t>
+                        <a:t>Fleet Book %: 25.2%</a:t>
                       </a:r>
                     </a:p>
                   </a:txBody>
@@ -3766,7 +3766,7 @@
                         <a:rPr sz="900">
                           <a:latin typeface="Segoe UI"/>
                         </a:rPr>
-                        <a:t>Non-Fleet Subs: 511  |  Binds: 120</a:t>
+                        <a:t>Non-Fleet Subs: 512  |  Binds: 124</a:t>
                       </a:r>
                     </a:p>
                   </a:txBody>
@@ -3803,7 +3803,7 @@
                         <a:rPr sz="900">
                           <a:latin typeface="Segoe UI"/>
                         </a:rPr>
-                        <a:t>Non-Fleet Bound Premium: $3,035,557.64</a:t>
+                        <a:t>Non-Fleet Bound Premium: $3,065,266.84</a:t>
                       </a:r>
                     </a:p>
                   </a:txBody>
@@ -3840,7 +3840,7 @@
                         <a:rPr sz="900">
                           <a:latin typeface="Segoe UI"/>
                         </a:rPr>
-                        <a:t>Non-Fleet Book %: 74.1%</a:t>
+                        <a:t>Non-Fleet Book %: 74.8%</a:t>
                       </a:r>
                     </a:p>
                   </a:txBody>
@@ -4581,7 +4581,7 @@
                         <a:rPr sz="800">
                           <a:latin typeface="Segoe UI"/>
                         </a:rPr>
-                        <a:t>38.8%</a:t>
+                        <a:t>39.2%</a:t>
                       </a:r>
                     </a:p>
                   </a:txBody>
@@ -4707,7 +4707,7 @@
                           </a:solidFill>
                           <a:latin typeface="Segoe UI"/>
                         </a:rPr>
-                        <a:t>25.3%</a:t>
+                        <a:t>27.3%</a:t>
                       </a:r>
                     </a:p>
                   </a:txBody>
@@ -4866,7 +4866,7 @@
                         <a:rPr sz="800">
                           <a:latin typeface="Segoe UI"/>
                         </a:rPr>
-                        <a:t>95</a:t>
+                        <a:t>96</a:t>
                       </a:r>
                     </a:p>
                   </a:txBody>
@@ -4983,7 +4983,7 @@
                           </a:solidFill>
                           <a:latin typeface="Segoe UI"/>
                         </a:rPr>
-                        <a:t>38</a:t>
+                        <a:t>41</a:t>
                       </a:r>
                     </a:p>
                   </a:txBody>
@@ -5262,7 +5262,7 @@
                           </a:solidFill>
                           <a:latin typeface="Segoe UI"/>
                         </a:rPr>
-                        <a:t>$589.3K</a:t>
+                        <a:t>$588.9K</a:t>
                       </a:r>
                     </a:p>
                   </a:txBody>

--- a/generated/Tier 1 Broker Scorecards/Commercial Trucking Insurance Agency LLC_Broker_Scorecard.pptx
+++ b/generated/Tier 1 Broker Scorecards/Commercial Trucking Insurance Agency LLC_Broker_Scorecard.pptx
@@ -3357,7 +3357,7 @@
                         <a:rPr sz="800">
                           <a:latin typeface="Segoe UI"/>
                         </a:rPr>
-                        <a:t>$13,030,311.27 / $12,854,223.94 / $4,095,943.00</a:t>
+                        <a:t>$13,030,311.27 / $12,873,854.32 / $4,115,573.38</a:t>
                       </a:r>
                     </a:p>
                   </a:txBody>
@@ -3394,7 +3394,7 @@
                         <a:rPr sz="900">
                           <a:latin typeface="Segoe UI"/>
                         </a:rPr>
-                        <a:t>Tier 1  |  24.46% / 15.00%</a:t>
+                        <a:t>Tier 1  |  25.05% / 15.00%</a:t>
                       </a:r>
                     </a:p>
                   </a:txBody>
@@ -3431,7 +3431,7 @@
                         <a:rPr sz="900">
                           <a:latin typeface="Segoe UI"/>
                         </a:rPr>
-                        <a:t>$18,242,435.78  (22.5% achieved)</a:t>
+                        <a:t>$18,242,435.78  (22.6% achieved)</a:t>
                       </a:r>
                     </a:p>
                   </a:txBody>
@@ -3653,7 +3653,7 @@
                         <a:rPr sz="900">
                           <a:latin typeface="Segoe UI"/>
                         </a:rPr>
-                        <a:t>Fleet Subs: 40  |  Binds: 11</a:t>
+                        <a:t>Fleet Subs: 41  |  Binds: 14</a:t>
                       </a:r>
                     </a:p>
                   </a:txBody>
@@ -3690,7 +3690,7 @@
                         <a:rPr sz="900">
                           <a:latin typeface="Segoe UI"/>
                         </a:rPr>
-                        <a:t>Fleet Bound Premium: $1,030,676.16</a:t>
+                        <a:t>Fleet Bound Premium: $1,174,889.45</a:t>
                       </a:r>
                     </a:p>
                   </a:txBody>
@@ -3727,7 +3727,7 @@
                         <a:rPr sz="900">
                           <a:latin typeface="Segoe UI"/>
                         </a:rPr>
-                        <a:t>Fleet Book %: 25.2%</a:t>
+                        <a:t>Fleet Book %: 28.5%</a:t>
                       </a:r>
                     </a:p>
                   </a:txBody>
@@ -3766,7 +3766,7 @@
                         <a:rPr sz="900">
                           <a:latin typeface="Segoe UI"/>
                         </a:rPr>
-                        <a:t>Non-Fleet Subs: 512  |  Binds: 124</a:t>
+                        <a:t>Non-Fleet Subs: 514  |  Binds: 125</a:t>
                       </a:r>
                     </a:p>
                   </a:txBody>
@@ -3803,7 +3803,7 @@
                         <a:rPr sz="900">
                           <a:latin typeface="Segoe UI"/>
                         </a:rPr>
-                        <a:t>Non-Fleet Bound Premium: $3,065,266.84</a:t>
+                        <a:t>Non-Fleet Bound Premium: $2,940,683.93</a:t>
                       </a:r>
                     </a:p>
                   </a:txBody>
@@ -3840,7 +3840,7 @@
                         <a:rPr sz="900">
                           <a:latin typeface="Segoe UI"/>
                         </a:rPr>
-                        <a:t>Non-Fleet Book %: 74.8%</a:t>
+                        <a:t>Non-Fleet Book %: 71.5%</a:t>
                       </a:r>
                     </a:p>
                   </a:txBody>
@@ -4428,7 +4428,7 @@
                           </a:solidFill>
                           <a:latin typeface="Segoe UI"/>
                         </a:rPr>
-                        <a:t>150</a:t>
+                        <a:t>153</a:t>
                       </a:r>
                     </a:p>
                   </a:txBody>
@@ -4707,7 +4707,7 @@
                           </a:solidFill>
                           <a:latin typeface="Segoe UI"/>
                         </a:rPr>
-                        <a:t>27.3%</a:t>
+                        <a:t>29.4%</a:t>
                       </a:r>
                     </a:p>
                   </a:txBody>
@@ -4983,7 +4983,7 @@
                           </a:solidFill>
                           <a:latin typeface="Segoe UI"/>
                         </a:rPr>
-                        <a:t>41</a:t>
+                        <a:t>45</a:t>
                       </a:r>
                     </a:p>
                   </a:txBody>
@@ -5262,7 +5262,7 @@
                           </a:solidFill>
                           <a:latin typeface="Segoe UI"/>
                         </a:rPr>
-                        <a:t>$588.9K</a:t>
+                        <a:t>$608.5K</a:t>
                       </a:r>
                     </a:p>
                   </a:txBody>

--- a/generated/Tier 1 Broker Scorecards/Commercial Trucking Insurance Agency LLC_Broker_Scorecard.pptx
+++ b/generated/Tier 1 Broker Scorecards/Commercial Trucking Insurance Agency LLC_Broker_Scorecard.pptx
@@ -3357,7 +3357,7 @@
                         <a:rPr sz="800">
                           <a:latin typeface="Segoe UI"/>
                         </a:rPr>
-                        <a:t>$13,030,311.27 / $12,873,854.32 / $4,115,573.38</a:t>
+                        <a:t>$13,030,311.27 / $12,945,482.78 / $4,187,201.84</a:t>
                       </a:r>
                     </a:p>
                   </a:txBody>
@@ -3394,7 +3394,7 @@
                         <a:rPr sz="900">
                           <a:latin typeface="Segoe UI"/>
                         </a:rPr>
-                        <a:t>Tier 1  |  25.05% / 15.00%</a:t>
+                        <a:t>Tier 1  |  24.82% / 15.00%</a:t>
                       </a:r>
                     </a:p>
                   </a:txBody>
@@ -3431,7 +3431,7 @@
                         <a:rPr sz="900">
                           <a:latin typeface="Segoe UI"/>
                         </a:rPr>
-                        <a:t>$18,242,435.78  (22.6% achieved)</a:t>
+                        <a:t>$18,242,435.78  (23.0% achieved)</a:t>
                       </a:r>
                     </a:p>
                   </a:txBody>
@@ -3653,7 +3653,7 @@
                         <a:rPr sz="900">
                           <a:latin typeface="Segoe UI"/>
                         </a:rPr>
-                        <a:t>Fleet Subs: 41  |  Binds: 14</a:t>
+                        <a:t>Fleet Subs: 39  |  Binds: 13</a:t>
                       </a:r>
                     </a:p>
                   </a:txBody>
@@ -3690,7 +3690,7 @@
                         <a:rPr sz="900">
                           <a:latin typeface="Segoe UI"/>
                         </a:rPr>
-                        <a:t>Fleet Bound Premium: $1,174,889.45</a:t>
+                        <a:t>Fleet Bound Premium: $1,203,071.99</a:t>
                       </a:r>
                     </a:p>
                   </a:txBody>
@@ -3727,7 +3727,7 @@
                         <a:rPr sz="900">
                           <a:latin typeface="Segoe UI"/>
                         </a:rPr>
-                        <a:t>Fleet Book %: 28.5%</a:t>
+                        <a:t>Fleet Book %: 28.7%</a:t>
                       </a:r>
                     </a:p>
                   </a:txBody>
@@ -3766,7 +3766,7 @@
                         <a:rPr sz="900">
                           <a:latin typeface="Segoe UI"/>
                         </a:rPr>
-                        <a:t>Non-Fleet Subs: 514  |  Binds: 125</a:t>
+                        <a:t>Non-Fleet Subs: 521  |  Binds: 126</a:t>
                       </a:r>
                     </a:p>
                   </a:txBody>
@@ -3803,7 +3803,7 @@
                         <a:rPr sz="900">
                           <a:latin typeface="Segoe UI"/>
                         </a:rPr>
-                        <a:t>Non-Fleet Bound Premium: $2,940,683.93</a:t>
+                        <a:t>Non-Fleet Bound Premium: $2,984,129.85</a:t>
                       </a:r>
                     </a:p>
                   </a:txBody>
@@ -3840,7 +3840,7 @@
                         <a:rPr sz="900">
                           <a:latin typeface="Segoe UI"/>
                         </a:rPr>
-                        <a:t>Non-Fleet Book %: 71.5%</a:t>
+                        <a:t>Non-Fleet Book %: 71.3%</a:t>
                       </a:r>
                     </a:p>
                   </a:txBody>
@@ -4428,7 +4428,7 @@
                           </a:solidFill>
                           <a:latin typeface="Segoe UI"/>
                         </a:rPr>
-                        <a:t>153</a:t>
+                        <a:t>172</a:t>
                       </a:r>
                     </a:p>
                   </a:txBody>
@@ -4581,7 +4581,7 @@
                         <a:rPr sz="800">
                           <a:latin typeface="Segoe UI"/>
                         </a:rPr>
-                        <a:t>39.2%</a:t>
+                        <a:t>39.6%</a:t>
                       </a:r>
                     </a:p>
                   </a:txBody>
@@ -4707,7 +4707,7 @@
                           </a:solidFill>
                           <a:latin typeface="Segoe UI"/>
                         </a:rPr>
-                        <a:t>29.4%</a:t>
+                        <a:t>28.5%</a:t>
                       </a:r>
                     </a:p>
                   </a:txBody>
@@ -4866,7 +4866,7 @@
                         <a:rPr sz="800">
                           <a:latin typeface="Segoe UI"/>
                         </a:rPr>
-                        <a:t>96</a:t>
+                        <a:t>97</a:t>
                       </a:r>
                     </a:p>
                   </a:txBody>
@@ -4983,7 +4983,7 @@
                           </a:solidFill>
                           <a:latin typeface="Segoe UI"/>
                         </a:rPr>
-                        <a:t>45</a:t>
+                        <a:t>49</a:t>
                       </a:r>
                     </a:p>
                   </a:txBody>
@@ -5262,7 +5262,7 @@
                           </a:solidFill>
                           <a:latin typeface="Segoe UI"/>
                         </a:rPr>
-                        <a:t>$608.5K</a:t>
+                        <a:t>$680.2K</a:t>
                       </a:r>
                     </a:p>
                   </a:txBody>

--- a/generated/Tier 1 Broker Scorecards/Commercial Trucking Insurance Agency LLC_Broker_Scorecard.pptx
+++ b/generated/Tier 1 Broker Scorecards/Commercial Trucking Insurance Agency LLC_Broker_Scorecard.pptx
@@ -3357,7 +3357,7 @@
                         <a:rPr sz="800">
                           <a:latin typeface="Segoe UI"/>
                         </a:rPr>
-                        <a:t>$13,030,311.27 / $12,945,482.78 / $4,187,201.84</a:t>
+                        <a:t>$13,030,311.27 / $12,983,261.84 / $4,224,980.90</a:t>
                       </a:r>
                     </a:p>
                   </a:txBody>
@@ -3394,7 +3394,7 @@
                         <a:rPr sz="900">
                           <a:latin typeface="Segoe UI"/>
                         </a:rPr>
-                        <a:t>Tier 1  |  24.82% / 15.00%</a:t>
+                        <a:t>Tier 1  |  26.38% / 15.00%</a:t>
                       </a:r>
                     </a:p>
                   </a:txBody>
@@ -3431,7 +3431,7 @@
                         <a:rPr sz="900">
                           <a:latin typeface="Segoe UI"/>
                         </a:rPr>
-                        <a:t>$18,242,435.78  (23.0% achieved)</a:t>
+                        <a:t>$18,242,435.78  (23.2% achieved)</a:t>
                       </a:r>
                     </a:p>
                   </a:txBody>
@@ -3653,7 +3653,7 @@
                         <a:rPr sz="900">
                           <a:latin typeface="Segoe UI"/>
                         </a:rPr>
-                        <a:t>Fleet Subs: 39  |  Binds: 13</a:t>
+                        <a:t>Fleet Subs: 40  |  Binds: 14</a:t>
                       </a:r>
                     </a:p>
                   </a:txBody>
@@ -3690,7 +3690,7 @@
                         <a:rPr sz="900">
                           <a:latin typeface="Segoe UI"/>
                         </a:rPr>
-                        <a:t>Fleet Bound Premium: $1,203,071.99</a:t>
+                        <a:t>Fleet Bound Premium: $1,147,972.01</a:t>
                       </a:r>
                     </a:p>
                   </a:txBody>
@@ -3727,7 +3727,7 @@
                         <a:rPr sz="900">
                           <a:latin typeface="Segoe UI"/>
                         </a:rPr>
-                        <a:t>Fleet Book %: 28.7%</a:t>
+                        <a:t>Fleet Book %: 27.2%</a:t>
                       </a:r>
                     </a:p>
                   </a:txBody>
@@ -3766,7 +3766,7 @@
                         <a:rPr sz="900">
                           <a:latin typeface="Segoe UI"/>
                         </a:rPr>
-                        <a:t>Non-Fleet Subs: 521  |  Binds: 126</a:t>
+                        <a:t>Non-Fleet Subs: 521  |  Binds: 134</a:t>
                       </a:r>
                     </a:p>
                   </a:txBody>
@@ -3803,7 +3803,7 @@
                         <a:rPr sz="900">
                           <a:latin typeface="Segoe UI"/>
                         </a:rPr>
-                        <a:t>Non-Fleet Bound Premium: $2,984,129.85</a:t>
+                        <a:t>Non-Fleet Bound Premium: $3,077,008.89</a:t>
                       </a:r>
                     </a:p>
                   </a:txBody>
@@ -3840,7 +3840,7 @@
                         <a:rPr sz="900">
                           <a:latin typeface="Segoe UI"/>
                         </a:rPr>
-                        <a:t>Non-Fleet Book %: 71.3%</a:t>
+                        <a:t>Non-Fleet Book %: 72.8%</a:t>
                       </a:r>
                     </a:p>
                   </a:txBody>
@@ -4428,7 +4428,7 @@
                           </a:solidFill>
                           <a:latin typeface="Segoe UI"/>
                         </a:rPr>
-                        <a:t>172</a:t>
+                        <a:t>174</a:t>
                       </a:r>
                     </a:p>
                   </a:txBody>
@@ -4581,7 +4581,7 @@
                         <a:rPr sz="800">
                           <a:latin typeface="Segoe UI"/>
                         </a:rPr>
-                        <a:t>39.6%</a:t>
+                        <a:t>39.2%</a:t>
                       </a:r>
                     </a:p>
                   </a:txBody>
@@ -4707,7 +4707,7 @@
                           </a:solidFill>
                           <a:latin typeface="Segoe UI"/>
                         </a:rPr>
-                        <a:t>28.5%</a:t>
+                        <a:t>32.8%</a:t>
                       </a:r>
                     </a:p>
                   </a:txBody>
@@ -4866,7 +4866,7 @@
                         <a:rPr sz="800">
                           <a:latin typeface="Segoe UI"/>
                         </a:rPr>
-                        <a:t>97</a:t>
+                        <a:t>96</a:t>
                       </a:r>
                     </a:p>
                   </a:txBody>
@@ -4983,7 +4983,7 @@
                           </a:solidFill>
                           <a:latin typeface="Segoe UI"/>
                         </a:rPr>
-                        <a:t>49</a:t>
+                        <a:t>57</a:t>
                       </a:r>
                     </a:p>
                   </a:txBody>
@@ -5262,7 +5262,7 @@
                           </a:solidFill>
                           <a:latin typeface="Segoe UI"/>
                         </a:rPr>
-                        <a:t>$680.2K</a:t>
+                        <a:t>$717.9K</a:t>
                       </a:r>
                     </a:p>
                   </a:txBody>

--- a/generated/Tier 1 Broker Scorecards/Commercial Trucking Insurance Agency LLC_Broker_Scorecard.pptx
+++ b/generated/Tier 1 Broker Scorecards/Commercial Trucking Insurance Agency LLC_Broker_Scorecard.pptx
@@ -3357,7 +3357,7 @@
                         <a:rPr sz="800">
                           <a:latin typeface="Segoe UI"/>
                         </a:rPr>
-                        <a:t>$13,030,311.27 / $12,983,261.84 / $4,224,980.90</a:t>
+                        <a:t>$13,030,311.27 / $13,015,445.48 / $4,257,164.54</a:t>
                       </a:r>
                     </a:p>
                   </a:txBody>
@@ -3394,7 +3394,7 @@
                         <a:rPr sz="900">
                           <a:latin typeface="Segoe UI"/>
                         </a:rPr>
-                        <a:t>Tier 1  |  26.38% / 15.00%</a:t>
+                        <a:t>Tier 1  |  27.18% / 15.00%</a:t>
                       </a:r>
                     </a:p>
                   </a:txBody>
@@ -3431,7 +3431,7 @@
                         <a:rPr sz="900">
                           <a:latin typeface="Segoe UI"/>
                         </a:rPr>
-                        <a:t>$18,242,435.78  (23.2% achieved)</a:t>
+                        <a:t>$18,242,435.78  (23.3% achieved)</a:t>
                       </a:r>
                     </a:p>
                   </a:txBody>
@@ -3653,7 +3653,7 @@
                         <a:rPr sz="900">
                           <a:latin typeface="Segoe UI"/>
                         </a:rPr>
-                        <a:t>Fleet Subs: 40  |  Binds: 14</a:t>
+                        <a:t>Fleet Subs: 40  |  Binds: 15</a:t>
                       </a:r>
                     </a:p>
                   </a:txBody>
@@ -3690,7 +3690,7 @@
                         <a:rPr sz="900">
                           <a:latin typeface="Segoe UI"/>
                         </a:rPr>
-                        <a:t>Fleet Bound Premium: $1,147,972.01</a:t>
+                        <a:t>Fleet Bound Premium: $1,203,971.98</a:t>
                       </a:r>
                     </a:p>
                   </a:txBody>
@@ -3727,7 +3727,7 @@
                         <a:rPr sz="900">
                           <a:latin typeface="Segoe UI"/>
                         </a:rPr>
-                        <a:t>Fleet Book %: 27.2%</a:t>
+                        <a:t>Fleet Book %: 28.3%</a:t>
                       </a:r>
                     </a:p>
                   </a:txBody>
@@ -3766,7 +3766,7 @@
                         <a:rPr sz="900">
                           <a:latin typeface="Segoe UI"/>
                         </a:rPr>
-                        <a:t>Non-Fleet Subs: 521  |  Binds: 134</a:t>
+                        <a:t>Non-Fleet Subs: 523  |  Binds: 138</a:t>
                       </a:r>
                     </a:p>
                   </a:txBody>
@@ -3803,7 +3803,7 @@
                         <a:rPr sz="900">
                           <a:latin typeface="Segoe UI"/>
                         </a:rPr>
-                        <a:t>Non-Fleet Bound Premium: $3,077,008.89</a:t>
+                        <a:t>Non-Fleet Bound Premium: $3,053,192.56</a:t>
                       </a:r>
                     </a:p>
                   </a:txBody>
@@ -3840,7 +3840,7 @@
                         <a:rPr sz="900">
                           <a:latin typeface="Segoe UI"/>
                         </a:rPr>
-                        <a:t>Non-Fleet Book %: 72.8%</a:t>
+                        <a:t>Non-Fleet Book %: 71.7%</a:t>
                       </a:r>
                     </a:p>
                   </a:txBody>
@@ -4428,7 +4428,7 @@
                           </a:solidFill>
                           <a:latin typeface="Segoe UI"/>
                         </a:rPr>
-                        <a:t>174</a:t>
+                        <a:t>177</a:t>
                       </a:r>
                     </a:p>
                   </a:txBody>
@@ -4581,7 +4581,7 @@
                         <a:rPr sz="800">
                           <a:latin typeface="Segoe UI"/>
                         </a:rPr>
-                        <a:t>39.2%</a:t>
+                        <a:t>38.8%</a:t>
                       </a:r>
                     </a:p>
                   </a:txBody>
@@ -4624,7 +4624,7 @@
                           </a:solidFill>
                           <a:latin typeface="Segoe UI"/>
                         </a:rPr>
-                        <a:t>30.1%</a:t>
+                        <a:t>30.6%</a:t>
                       </a:r>
                     </a:p>
                   </a:txBody>
@@ -4664,7 +4664,7 @@
                         <a:rPr sz="800">
                           <a:latin typeface="Segoe UI"/>
                         </a:rPr>
-                        <a:t>46.1%</a:t>
+                        <a:t>46.6%</a:t>
                       </a:r>
                     </a:p>
                   </a:txBody>
@@ -4707,7 +4707,7 @@
                           </a:solidFill>
                           <a:latin typeface="Segoe UI"/>
                         </a:rPr>
-                        <a:t>32.8%</a:t>
+                        <a:t>34.5%</a:t>
                       </a:r>
                     </a:p>
                   </a:txBody>
@@ -4866,7 +4866,7 @@
                         <a:rPr sz="800">
                           <a:latin typeface="Segoe UI"/>
                         </a:rPr>
-                        <a:t>96</a:t>
+                        <a:t>95</a:t>
                       </a:r>
                     </a:p>
                   </a:txBody>
@@ -4906,7 +4906,7 @@
                           </a:solidFill>
                           <a:latin typeface="Segoe UI"/>
                         </a:rPr>
-                        <a:t>59</a:t>
+                        <a:t>60</a:t>
                       </a:r>
                     </a:p>
                   </a:txBody>
@@ -4943,7 +4943,7 @@
                         <a:rPr sz="800">
                           <a:latin typeface="Segoe UI"/>
                         </a:rPr>
-                        <a:t>94</a:t>
+                        <a:t>95</a:t>
                       </a:r>
                     </a:p>
                   </a:txBody>
@@ -4983,7 +4983,7 @@
                           </a:solidFill>
                           <a:latin typeface="Segoe UI"/>
                         </a:rPr>
-                        <a:t>57</a:t>
+                        <a:t>61</a:t>
                       </a:r>
                     </a:p>
                   </a:txBody>
@@ -5262,7 +5262,7 @@
                           </a:solidFill>
                           <a:latin typeface="Segoe UI"/>
                         </a:rPr>
-                        <a:t>$717.9K</a:t>
+                        <a:t>$750.1K</a:t>
                       </a:r>
                     </a:p>
                   </a:txBody>

--- a/generated/Tier 1 Broker Scorecards/Commercial Trucking Insurance Agency LLC_Broker_Scorecard.pptx
+++ b/generated/Tier 1 Broker Scorecards/Commercial Trucking Insurance Agency LLC_Broker_Scorecard.pptx
@@ -3357,7 +3357,7 @@
                         <a:rPr sz="800">
                           <a:latin typeface="Segoe UI"/>
                         </a:rPr>
-                        <a:t>$13,030,311.27 / $13,015,445.48 / $4,257,164.54</a:t>
+                        <a:t>$13,030,311.27 / $11,479,495.11 / $4,257,164.54</a:t>
                       </a:r>
                     </a:p>
                   </a:txBody>
@@ -3394,7 +3394,7 @@
                         <a:rPr sz="900">
                           <a:latin typeface="Segoe UI"/>
                         </a:rPr>
-                        <a:t>Tier 1  |  27.18% / 15.00%</a:t>
+                        <a:t>Tier 1  |  27.00% / 15.00%</a:t>
                       </a:r>
                     </a:p>
                   </a:txBody>
@@ -3653,7 +3653,7 @@
                         <a:rPr sz="900">
                           <a:latin typeface="Segoe UI"/>
                         </a:rPr>
-                        <a:t>Fleet Subs: 40  |  Binds: 15</a:t>
+                        <a:t>Fleet Subs: 40  |  Binds: 14</a:t>
                       </a:r>
                     </a:p>
                   </a:txBody>
@@ -3690,7 +3690,7 @@
                         <a:rPr sz="900">
                           <a:latin typeface="Segoe UI"/>
                         </a:rPr>
-                        <a:t>Fleet Bound Premium: $1,203,971.98</a:t>
+                        <a:t>Fleet Bound Premium: $1,158,403.21</a:t>
                       </a:r>
                     </a:p>
                   </a:txBody>
@@ -3727,7 +3727,7 @@
                         <a:rPr sz="900">
                           <a:latin typeface="Segoe UI"/>
                         </a:rPr>
-                        <a:t>Fleet Book %: 28.3%</a:t>
+                        <a:t>Fleet Book %: 27.2%</a:t>
                       </a:r>
                     </a:p>
                   </a:txBody>
@@ -3803,7 +3803,7 @@
                         <a:rPr sz="900">
                           <a:latin typeface="Segoe UI"/>
                         </a:rPr>
-                        <a:t>Non-Fleet Bound Premium: $3,053,192.56</a:t>
+                        <a:t>Non-Fleet Bound Premium: $3,098,761.33</a:t>
                       </a:r>
                     </a:p>
                   </a:txBody>
@@ -3840,7 +3840,7 @@
                         <a:rPr sz="900">
                           <a:latin typeface="Segoe UI"/>
                         </a:rPr>
-                        <a:t>Non-Fleet Book %: 71.7%</a:t>
+                        <a:t>Non-Fleet Book %: 72.8%</a:t>
                       </a:r>
                     </a:p>
                   </a:txBody>
@@ -4581,7 +4581,7 @@
                         <a:rPr sz="800">
                           <a:latin typeface="Segoe UI"/>
                         </a:rPr>
-                        <a:t>38.8%</a:t>
+                        <a:t>39.2%</a:t>
                       </a:r>
                     </a:p>
                   </a:txBody>
@@ -4664,7 +4664,7 @@
                         <a:rPr sz="800">
                           <a:latin typeface="Segoe UI"/>
                         </a:rPr>
-                        <a:t>46.6%</a:t>
+                        <a:t>46.1%</a:t>
                       </a:r>
                     </a:p>
                   </a:txBody>
@@ -4866,7 +4866,7 @@
                         <a:rPr sz="800">
                           <a:latin typeface="Segoe UI"/>
                         </a:rPr>
-                        <a:t>95</a:t>
+                        <a:t>96</a:t>
                       </a:r>
                     </a:p>
                   </a:txBody>
@@ -4943,7 +4943,7 @@
                         <a:rPr sz="800">
                           <a:latin typeface="Segoe UI"/>
                         </a:rPr>
-                        <a:t>95</a:t>
+                        <a:t>94</a:t>
                       </a:r>
                     </a:p>
                   </a:txBody>
